--- a/assets/ppts/M3.3_Multiple_Access_Protocols.pptx
+++ b/assets/ppts/M3.3_Multiple_Access_Protocols.pptx
@@ -9,6 +9,7 @@
     <p:sldId id="257" r:id="rId8"/>
     <p:sldId id="258" r:id="rId9"/>
     <p:sldId id="259" r:id="rId10"/>
+    <p:sldId id="260" r:id="rId11"/>
   </p:sldIdLst>
   <p:sldSz cx="12191695" cy="6858000" type="screen4x3"/>
   <p:notesSz cx="6858000" cy="9144000"/>
@@ -3142,8 +3143,8 @@
         </p:nvSpPr>
         <p:spPr>
           <a:xfrm>
-            <a:off x="822960" y="1188720"/>
-            <a:ext cx="164592" cy="4480560"/>
+            <a:off x="0" y="0"/>
+            <a:ext cx="12191695" cy="137160"/>
           </a:xfrm>
           <a:prstGeom prst="rect">
             <a:avLst/>
@@ -3179,14 +3180,57 @@
       </p:sp>
       <p:sp>
         <p:nvSpPr>
-          <p:cNvPr id="4" name="TextBox 3"/>
+          <p:cNvPr id="4" name="Rectangle 3"/>
+          <p:cNvSpPr/>
+          <p:nvPr/>
+        </p:nvSpPr>
+        <p:spPr>
+          <a:xfrm>
+            <a:off x="822960" y="1097280"/>
+            <a:ext cx="164592" cy="4663440"/>
+          </a:xfrm>
+          <a:prstGeom prst="rect">
+            <a:avLst/>
+          </a:prstGeom>
+          <a:solidFill>
+            <a:srgbClr val="D97706"/>
+          </a:solidFill>
+          <a:ln>
+            <a:noFill/>
+          </a:ln>
+        </p:spPr>
+        <p:style>
+          <a:lnRef idx="1">
+            <a:schemeClr val="accent1"/>
+          </a:lnRef>
+          <a:fillRef idx="3">
+            <a:schemeClr val="accent1"/>
+          </a:fillRef>
+          <a:effectRef idx="2">
+            <a:schemeClr val="accent1"/>
+          </a:effectRef>
+          <a:fontRef idx="minor">
+            <a:schemeClr val="lt1"/>
+          </a:fontRef>
+        </p:style>
+        <p:txBody>
+          <a:bodyPr rtlCol="0" anchor="ctr"/>
+          <a:lstStyle/>
+          <a:p>
+            <a:pPr algn="ctr"/>
+          </a:p>
+        </p:txBody>
+      </p:sp>
+      <p:sp>
+        <p:nvSpPr>
+          <p:cNvPr id="5" name="TextBox 4"/>
           <p:cNvSpPr txBox="1"/>
           <p:nvPr/>
         </p:nvSpPr>
         <p:spPr>
           <a:xfrm>
-            <a:off x="1280160" y="1097280"/>
-            <a:ext cx="10058400" cy="4663440"/>
+            <a:off x="1234440" y="1005840"/>
+            <a:ext cx="10241280" cy="4846320"/>
           </a:xfrm>
           <a:prstGeom prst="rect">
             <a:avLst/>
@@ -3201,70 +3245,165 @@
           <a:p>
             <a:pPr>
               <a:spcAft>
+                <a:spcPts val="1000"/>
+              </a:spcAft>
+              <a:defRPr b="1" sz="1300">
+                <a:solidFill>
+                  <a:srgbClr val="D97706"/>
+                </a:solidFill>
+              </a:defRPr>
+            </a:pPr>
+            <a:r>
+              <a:t>PCCST501 Computer Networks | KTU 2024 Scheme • MODULE 3 • M3.3</a:t>
+            </a:r>
+          </a:p>
+          <a:p>
+            <a:pPr>
+              <a:spcAft>
                 <a:spcPts val="1200"/>
               </a:spcAft>
-              <a:defRPr b="1" sz="1300">
+              <a:defRPr b="1" sz="3000">
+                <a:solidFill>
+                  <a:srgbClr val="F8FAFC"/>
+                </a:solidFill>
+              </a:defRPr>
+            </a:pPr>
+            <a:r>
+              <a:t>Multiple Access Control (MAC) Protocols</a:t>
+            </a:r>
+          </a:p>
+          <a:p>
+            <a:pPr>
+              <a:spcAft>
+                <a:spcPts val="2400"/>
+              </a:spcAft>
+              <a:defRPr sz="1600">
+                <a:solidFill>
+                  <a:srgbClr val="94A3B8"/>
+                </a:solidFill>
+              </a:defRPr>
+            </a:pPr>
+            <a:r>
+              <a:t>Random Access (Pure &amp; Slotted ALOHA, CSMA, CSMA/CD, CSMA/CA), Controlled Access (Polling, Token Ring), Channelization (CDMA)</a:t>
+            </a:r>
+          </a:p>
+          <a:p>
+            <a:pPr>
+              <a:spcAft>
+                <a:spcPts val="300"/>
+              </a:spcAft>
+              <a:defRPr b="1" sz="1350">
+                <a:solidFill>
+                  <a:srgbClr val="E2E8F0"/>
+                </a:solidFill>
+              </a:defRPr>
+            </a:pPr>
+            <a:r>
+              <a:t>Prepared by: Prof. Anju Markose | Assistant Professor, Dept. of CSE | VJCET</a:t>
+            </a:r>
+          </a:p>
+          <a:p>
+            <a:pPr>
+              <a:defRPr sz="1150">
+                <a:solidFill>
+                  <a:srgbClr val="94A3B8"/>
+                </a:solidFill>
+              </a:defRPr>
+            </a:pPr>
+            <a:r>
+              <a:t>Viswajyothi College of Engineering and Technology (VJCET), Vazhakulam • KTU S5 CSE</a:t>
+            </a:r>
+          </a:p>
+        </p:txBody>
+      </p:sp>
+      <p:sp>
+        <p:nvSpPr>
+          <p:cNvPr id="6" name="Rounded Rectangle 5"/>
+          <p:cNvSpPr/>
+          <p:nvPr/>
+        </p:nvSpPr>
+        <p:spPr>
+          <a:xfrm>
+            <a:off x="8412480" y="5120640"/>
+            <a:ext cx="3017520" cy="822960"/>
+          </a:xfrm>
+          <a:prstGeom prst="roundRect">
+            <a:avLst/>
+          </a:prstGeom>
+          <a:solidFill>
+            <a:srgbClr val="1E293B"/>
+          </a:solidFill>
+          <a:ln w="12700">
+            <a:solidFill>
+              <a:srgbClr val="0E7490"/>
+            </a:solidFill>
+          </a:ln>
+        </p:spPr>
+        <p:style>
+          <a:lnRef idx="1">
+            <a:schemeClr val="accent1"/>
+          </a:lnRef>
+          <a:fillRef idx="3">
+            <a:schemeClr val="accent1"/>
+          </a:fillRef>
+          <a:effectRef idx="2">
+            <a:schemeClr val="accent1"/>
+          </a:effectRef>
+          <a:fontRef idx="minor">
+            <a:schemeClr val="lt1"/>
+          </a:fontRef>
+        </p:style>
+        <p:txBody>
+          <a:bodyPr rtlCol="0" anchor="ctr"/>
+          <a:lstStyle/>
+          <a:p>
+            <a:pPr algn="ctr"/>
+          </a:p>
+        </p:txBody>
+      </p:sp>
+      <p:sp>
+        <p:nvSpPr>
+          <p:cNvPr id="7" name="TextBox 6"/>
+          <p:cNvSpPr txBox="1"/>
+          <p:nvPr/>
+        </p:nvSpPr>
+        <p:spPr>
+          <a:xfrm>
+            <a:off x="8503920" y="5166360"/>
+            <a:ext cx="2834640" cy="731520"/>
+          </a:xfrm>
+          <a:prstGeom prst="rect">
+            <a:avLst/>
+          </a:prstGeom>
+          <a:noFill/>
+        </p:spPr>
+        <p:txBody>
+          <a:bodyPr wrap="none">
+            <a:spAutoFit/>
+          </a:bodyPr>
+          <a:lstStyle/>
+          <a:p>
+            <a:pPr>
+              <a:defRPr b="1" sz="1050">
                 <a:solidFill>
                   <a:srgbClr val="D97706"/>
                 </a:solidFill>
               </a:defRPr>
             </a:pPr>
             <a:r>
-              <a:t>PCCST501 Computer Networks | KTU 2024 Scheme • MODULE 3 • M3.3</a:t>
-            </a:r>
-          </a:p>
-          <a:p>
-            <a:pPr>
-              <a:spcAft>
-                <a:spcPts val="1400"/>
-              </a:spcAft>
-              <a:defRPr b="1" sz="3200">
+              <a:t>KTU B.Tech Curriculum</a:t>
+            </a:r>
+          </a:p>
+          <a:p>
+            <a:pPr>
+              <a:defRPr sz="950">
                 <a:solidFill>
                   <a:srgbClr val="F8FAFC"/>
                 </a:solidFill>
               </a:defRPr>
             </a:pPr>
             <a:r>
-              <a:t>Multiple Access Protocols (MAC)</a:t>
-            </a:r>
-          </a:p>
-          <a:p>
-            <a:pPr>
-              <a:spcAft>
-                <a:spcPts val="2800"/>
-              </a:spcAft>
-              <a:defRPr sz="1700">
-                <a:solidFill>
-                  <a:srgbClr val="94A3B8"/>
-                </a:solidFill>
-              </a:defRPr>
-            </a:pPr>
-            <a:r>
-              <a:t>Random Access (ALOHA, CSMA/CD, CSMA/CA), Controlled Access (Polling, Token Ring) &amp; Channelization (CDMA)</a:t>
-            </a:r>
-          </a:p>
-          <a:p>
-            <a:pPr>
-              <a:defRPr b="1" sz="1300">
-                <a:solidFill>
-                  <a:srgbClr val="E2E8F0"/>
-                </a:solidFill>
-              </a:defRPr>
-            </a:pPr>
-            <a:r>
-              <a:t>Prepared by: Prof. Anju Markose | Assistant Professor, Dept. of CSE | VJCET</a:t>
-            </a:r>
-          </a:p>
-          <a:p>
-            <a:pPr>
-              <a:defRPr sz="1100">
-                <a:solidFill>
-                  <a:srgbClr val="94A3B8"/>
-                </a:solidFill>
-              </a:defRPr>
-            </a:pPr>
-            <a:r>
-              <a:t>Viswajyothi College of Engineering and Technology (VJCET), Vazhakulam</a:t>
+              <a:t>Official Classroom Slide Deck</a:t>
             </a:r>
           </a:p>
         </p:txBody>
@@ -3396,7 +3535,7 @@
           <a:lstStyle/>
           <a:p>
             <a:pPr>
-              <a:defRPr b="1" sz="2300">
+              <a:defRPr b="1" sz="2200">
                 <a:solidFill>
                   <a:srgbClr val="F8FAFC"/>
                 </a:solidFill>
@@ -3438,7 +3577,7 @@
               </a:defRPr>
             </a:pPr>
             <a:r>
-              <a:t>M3.3 ALOHA PROTOCOLS</a:t>
+              <a:t>M3.3 ALOHA COMPARISON</a:t>
             </a:r>
           </a:p>
         </p:txBody>
@@ -3451,18 +3590,18 @@
         </p:nvSpPr>
         <p:spPr>
           <a:xfrm>
-            <a:off x="731520" y="1280160"/>
-            <a:ext cx="5212080" cy="4846320"/>
+            <a:off x="731520" y="1234440"/>
+            <a:ext cx="5212080" cy="4892040"/>
           </a:xfrm>
           <a:prstGeom prst="roundRect">
             <a:avLst/>
           </a:prstGeom>
           <a:solidFill>
-            <a:srgbClr val="F1F5F9"/>
+            <a:srgbClr val="F8FAFC"/>
           </a:solidFill>
           <a:ln w="19050">
             <a:solidFill>
-              <a:srgbClr val="0E7490"/>
+              <a:srgbClr val="0F1E4A"/>
             </a:solidFill>
           </a:ln>
         </p:spPr>
@@ -3496,7 +3635,7 @@
         </p:nvSpPr>
         <p:spPr>
           <a:xfrm>
-            <a:off x="914400" y="1417320"/>
+            <a:off x="914400" y="1371600"/>
             <a:ext cx="4846320" cy="4572000"/>
           </a:xfrm>
           <a:prstGeom prst="rect">
@@ -3512,76 +3651,91 @@
           <a:p>
             <a:pPr>
               <a:spcAft>
-                <a:spcPts val="1200"/>
+                <a:spcPts val="1000"/>
               </a:spcAft>
-              <a:defRPr b="1" sz="1600">
+              <a:defRPr b="1" sz="1550">
                 <a:solidFill>
                   <a:srgbClr val="0F1E4A"/>
                 </a:solidFill>
               </a:defRPr>
             </a:pPr>
             <a:r>
-              <a:t>Pure ALOHA (Abramson, 1970)</a:t>
+              <a:t>Pure ALOHA (Norman Abramson, 1970)</a:t>
             </a:r>
           </a:p>
           <a:p>
             <a:pPr>
               <a:spcAft>
-                <a:spcPts val="600"/>
+                <a:spcPts val="500"/>
               </a:spcAft>
-              <a:defRPr sz="1250">
-                <a:solidFill>
-                  <a:srgbClr val="1E293B"/>
-                </a:solidFill>
-              </a:defRPr>
-            </a:pPr>
-            <a:r>
-              <a:t>• Transmission Rule: Nodes transmit frames immediately whenever data is ready</a:t>
+              <a:defRPr sz="1200">
+                <a:solidFill>
+                  <a:srgbClr val="0F172A"/>
+                </a:solidFill>
+              </a:defRPr>
+            </a:pPr>
+            <a:r>
+              <a:t>• Transmission Rule: Transmit continuous frame whenever data is ready without sensing channel</a:t>
             </a:r>
           </a:p>
           <a:p>
             <a:pPr>
               <a:spcAft>
-                <a:spcPts val="600"/>
+                <a:spcPts val="500"/>
               </a:spcAft>
-              <a:defRPr sz="1250">
-                <a:solidFill>
-                  <a:srgbClr val="1E293B"/>
-                </a:solidFill>
-              </a:defRPr>
-            </a:pPr>
-            <a:r>
-              <a:t>• Vulnerable Period: $2 \times T_{frame}$ (collision if any other node transmits within $\pm T_{frame}$)</a:t>
+              <a:defRPr sz="1200">
+                <a:solidFill>
+                  <a:srgbClr val="0F172A"/>
+                </a:solidFill>
+              </a:defRPr>
+            </a:pPr>
+            <a:r>
+              <a:t>• Vulnerable Period: $V_p = 2 \times T_{frame}$ (Collision occurs if any other node transmits within 2 frame times)</a:t>
             </a:r>
           </a:p>
           <a:p>
             <a:pPr>
               <a:spcAft>
-                <a:spcPts val="600"/>
+                <a:spcPts val="500"/>
               </a:spcAft>
-              <a:defRPr sz="1250">
-                <a:solidFill>
-                  <a:srgbClr val="1E293B"/>
-                </a:solidFill>
-              </a:defRPr>
-            </a:pPr>
-            <a:r>
-              <a:t>• Throughput Equation: $S = G \cdot e^{-2G}$ (where $G$ is traffic load)</a:t>
+              <a:defRPr sz="1200">
+                <a:solidFill>
+                  <a:srgbClr val="0F172A"/>
+                </a:solidFill>
+              </a:defRPr>
+            </a:pPr>
+            <a:r>
+              <a:t>• Throughput Formula: $S = G \cdot e^{-2G}$ where $G$ = traffic load</a:t>
             </a:r>
           </a:p>
           <a:p>
             <a:pPr>
               <a:spcAft>
-                <a:spcPts val="600"/>
+                <a:spcPts val="500"/>
               </a:spcAft>
-              <a:defRPr sz="1250">
-                <a:solidFill>
-                  <a:srgbClr val="1E293B"/>
-                </a:solidFill>
-              </a:defRPr>
-            </a:pPr>
-            <a:r>
-              <a:t>• Maximum Throughput: $S_{max} = \frac{1}{2e} \approx 18.4\%$ (achieved at $G = 0.5$)</a:t>
+              <a:defRPr sz="1200">
+                <a:solidFill>
+                  <a:srgbClr val="0F172A"/>
+                </a:solidFill>
+              </a:defRPr>
+            </a:pPr>
+            <a:r>
+              <a:t>• Maximum Efficiency: Maximum throughput $S_{max} = 1 / (2e) \approx 18.4\%$ at $G = 0.5$</a:t>
+            </a:r>
+          </a:p>
+          <a:p>
+            <a:pPr>
+              <a:spcAft>
+                <a:spcPts val="500"/>
+              </a:spcAft>
+              <a:defRPr sz="1200">
+                <a:solidFill>
+                  <a:srgbClr val="0F172A"/>
+                </a:solidFill>
+              </a:defRPr>
+            </a:pPr>
+            <a:r>
+              <a:t>• Collisions: High collision rate due to uncoordinated overlapping frames</a:t>
             </a:r>
           </a:p>
         </p:txBody>
@@ -3594,8 +3748,8 @@
         </p:nvSpPr>
         <p:spPr>
           <a:xfrm>
-            <a:off x="6309360" y="1280160"/>
-            <a:ext cx="5212080" cy="4846320"/>
+            <a:off x="6309360" y="1234440"/>
+            <a:ext cx="5212080" cy="4892040"/>
           </a:xfrm>
           <a:prstGeom prst="roundRect">
             <a:avLst/>
@@ -3605,7 +3759,7 @@
           </a:solidFill>
           <a:ln w="19050">
             <a:solidFill>
-              <a:srgbClr val="0F1E4A"/>
+              <a:srgbClr val="0E7490"/>
             </a:solidFill>
           </a:ln>
         </p:spPr>
@@ -3639,7 +3793,7 @@
         </p:nvSpPr>
         <p:spPr>
           <a:xfrm>
-            <a:off x="6492240" y="1417320"/>
+            <a:off x="6492240" y="1371600"/>
             <a:ext cx="4846320" cy="4572000"/>
           </a:xfrm>
           <a:prstGeom prst="rect">
@@ -3655,9 +3809,9 @@
           <a:p>
             <a:pPr>
               <a:spcAft>
-                <a:spcPts val="1200"/>
+                <a:spcPts val="1000"/>
               </a:spcAft>
-              <a:defRPr b="1" sz="1600">
+              <a:defRPr b="1" sz="1550">
                 <a:solidFill>
                   <a:srgbClr val="0E7490"/>
                 </a:solidFill>
@@ -3670,61 +3824,76 @@
           <a:p>
             <a:pPr>
               <a:spcAft>
-                <a:spcPts val="600"/>
+                <a:spcPts val="500"/>
               </a:spcAft>
-              <a:defRPr sz="1250">
-                <a:solidFill>
-                  <a:srgbClr val="1E293B"/>
-                </a:solidFill>
-              </a:defRPr>
-            </a:pPr>
-            <a:r>
-              <a:t>• Transmission Rule: Time divided into synchronized slots ($T_{slot} = T_{frame}$). Nodes transmit only at slot boundary</a:t>
+              <a:defRPr sz="1200">
+                <a:solidFill>
+                  <a:srgbClr val="0F172A"/>
+                </a:solidFill>
+              </a:defRPr>
+            </a:pPr>
+            <a:r>
+              <a:t>• Transmission Rule: Time divided into discrete slots equal to $T_{frame}$. Nodes transmit strictly at slot boundaries</a:t>
             </a:r>
           </a:p>
           <a:p>
             <a:pPr>
               <a:spcAft>
-                <a:spcPts val="600"/>
+                <a:spcPts val="500"/>
               </a:spcAft>
-              <a:defRPr sz="1250">
-                <a:solidFill>
-                  <a:srgbClr val="1E293B"/>
-                </a:solidFill>
-              </a:defRPr>
-            </a:pPr>
-            <a:r>
-              <a:t>• Vulnerable Period: $1 \times T_{frame}$ (halved compared to Pure ALOHA)</a:t>
+              <a:defRPr sz="1200">
+                <a:solidFill>
+                  <a:srgbClr val="0F172A"/>
+                </a:solidFill>
+              </a:defRPr>
+            </a:pPr>
+            <a:r>
+              <a:t>• Vulnerable Period: $V_p = 1 \times T_{frame}$ (Halves vulnerability interval)</a:t>
             </a:r>
           </a:p>
           <a:p>
             <a:pPr>
               <a:spcAft>
-                <a:spcPts val="600"/>
+                <a:spcPts val="500"/>
               </a:spcAft>
-              <a:defRPr sz="1250">
-                <a:solidFill>
-                  <a:srgbClr val="1E293B"/>
-                </a:solidFill>
-              </a:defRPr>
-            </a:pPr>
-            <a:r>
-              <a:t>• Throughput Equation: $S = G \cdot e^{-G}$</a:t>
+              <a:defRPr sz="1200">
+                <a:solidFill>
+                  <a:srgbClr val="0F172A"/>
+                </a:solidFill>
+              </a:defRPr>
+            </a:pPr>
+            <a:r>
+              <a:t>• Throughput Formula: $S = G \cdot e^{-G}$</a:t>
             </a:r>
           </a:p>
           <a:p>
             <a:pPr>
               <a:spcAft>
-                <a:spcPts val="600"/>
+                <a:spcPts val="500"/>
               </a:spcAft>
-              <a:defRPr sz="1250">
-                <a:solidFill>
-                  <a:srgbClr val="1E293B"/>
-                </a:solidFill>
-              </a:defRPr>
-            </a:pPr>
-            <a:r>
-              <a:t>• Maximum Throughput: $S_{max} = \frac{1}{e} \approx 36.8\%$ (achieved at $G = 1.0$)</a:t>
+              <a:defRPr sz="1200">
+                <a:solidFill>
+                  <a:srgbClr val="0F172A"/>
+                </a:solidFill>
+              </a:defRPr>
+            </a:pPr>
+            <a:r>
+              <a:t>• Maximum Efficiency: Maximum throughput $S_{max} = 1 / e \approx 36.8\%$ at $G = 1.0$ (Exactly doubles Pure ALOHA!)</a:t>
+            </a:r>
+          </a:p>
+          <a:p>
+            <a:pPr>
+              <a:spcAft>
+                <a:spcPts val="500"/>
+              </a:spcAft>
+              <a:defRPr sz="1200">
+                <a:solidFill>
+                  <a:srgbClr val="0F172A"/>
+                </a:solidFill>
+              </a:defRPr>
+            </a:pPr>
+            <a:r>
+              <a:t>• Synchronization: Requires global slot synchronization across all nodes</a:t>
             </a:r>
           </a:p>
         </p:txBody>
@@ -3737,8 +3906,8 @@
         </p:nvSpPr>
         <p:spPr>
           <a:xfrm>
-            <a:off x="731520" y="6309360"/>
-            <a:ext cx="10789920" cy="365760"/>
+            <a:off x="731520" y="6327648"/>
+            <a:ext cx="10789920" cy="320040"/>
           </a:xfrm>
           <a:prstGeom prst="rect">
             <a:avLst/>
@@ -3760,6 +3929,41 @@
             </a:pPr>
             <a:r>
               <a:t>PCCST501 Computer Networks | KTU 2024 Scheme | Prof. Anju Markose | Assistant Professor, Dept. of CSE | VJCET</a:t>
+            </a:r>
+          </a:p>
+        </p:txBody>
+      </p:sp>
+      <p:sp>
+        <p:nvSpPr>
+          <p:cNvPr id="11" name="TextBox 10"/>
+          <p:cNvSpPr txBox="1"/>
+          <p:nvPr/>
+        </p:nvSpPr>
+        <p:spPr>
+          <a:xfrm>
+            <a:off x="6858000" y="6327648"/>
+            <a:ext cx="4572000" cy="320040"/>
+          </a:xfrm>
+          <a:prstGeom prst="rect">
+            <a:avLst/>
+          </a:prstGeom>
+          <a:noFill/>
+        </p:spPr>
+        <p:txBody>
+          <a:bodyPr wrap="none">
+            <a:spAutoFit/>
+          </a:bodyPr>
+          <a:lstStyle/>
+          <a:p>
+            <a:pPr algn="r">
+              <a:defRPr sz="950">
+                <a:solidFill>
+                  <a:srgbClr val="64748B"/>
+                </a:solidFill>
+              </a:defRPr>
+            </a:pPr>
+            <a:r>
+              <a:t>Dept. of CSE, VJCET</a:t>
             </a:r>
           </a:p>
         </p:txBody>
@@ -3891,14 +4095,14 @@
           <a:lstStyle/>
           <a:p>
             <a:pPr>
-              <a:defRPr b="1" sz="2300">
+              <a:defRPr b="1" sz="2200">
                 <a:solidFill>
                   <a:srgbClr val="F8FAFC"/>
                 </a:solidFill>
               </a:defRPr>
             </a:pPr>
             <a:r>
-              <a:t>3.3.2 CSMA/CD (Carrier Sense Multiple Access with Collision Detection)</a:t>
+              <a:t>3.3.2 CSMA/CD: Carrier Sense Multiple Access with Collision Detection</a:t>
             </a:r>
           </a:p>
         </p:txBody>
@@ -3933,7 +4137,7 @@
               </a:defRPr>
             </a:pPr>
             <a:r>
-              <a:t>M3.3 CSMA/CD</a:t>
+              <a:t>M3.3 CSMA/CD PROTOCOL</a:t>
             </a:r>
           </a:p>
         </p:txBody>
@@ -3946,7 +4150,7 @@
         </p:nvSpPr>
         <p:spPr>
           <a:xfrm>
-            <a:off x="731520" y="1280160"/>
+            <a:off x="731520" y="1234440"/>
             <a:ext cx="6858000" cy="4937760"/>
           </a:xfrm>
           <a:prstGeom prst="rect">
@@ -3964,29 +4168,29 @@
               <a:spcAft>
                 <a:spcPts val="200"/>
               </a:spcAft>
-              <a:defRPr b="1" sz="1500">
+              <a:defRPr b="1" sz="1450">
                 <a:solidFill>
                   <a:srgbClr val="0F1E4A"/>
                 </a:solidFill>
               </a:defRPr>
             </a:pPr>
             <a:r>
-              <a:t>• Carrier Sensing</a:t>
+              <a:t>• Carrier Sense (Listen Before Talk)</a:t>
             </a:r>
           </a:p>
           <a:p>
             <a:pPr>
               <a:spcAft>
-                <a:spcPts val="800"/>
+                <a:spcPts val="700"/>
               </a:spcAft>
-              <a:defRPr sz="1300">
-                <a:solidFill>
-                  <a:srgbClr val="1E293B"/>
-                </a:solidFill>
-              </a:defRPr>
-            </a:pPr>
-            <a:r>
-              <a:t>   Listen Before Talk: Station senses channel before transmitting (1-persistent: transmits immediately when idle; Non-persistent: waits random delay if busy; p-persistent: transmits with probability $p$).</a:t>
+              <a:defRPr sz="1250">
+                <a:solidFill>
+                  <a:srgbClr val="0F172A"/>
+                </a:solidFill>
+              </a:defRPr>
+            </a:pPr>
+            <a:r>
+              <a:t>   Node listens to channel before transmitting. 1-persistent: transmits immediately when idle; Non-persistent: waits random backoff if busy; p-persistent: transmits with probability $p$ when idle.</a:t>
             </a:r>
           </a:p>
           <a:p>
@@ -3994,7 +4198,7 @@
               <a:spcAft>
                 <a:spcPts val="200"/>
               </a:spcAft>
-              <a:defRPr b="1" sz="1500">
+              <a:defRPr b="1" sz="1450">
                 <a:solidFill>
                   <a:srgbClr val="0F1E4A"/>
                 </a:solidFill>
@@ -4007,16 +4211,16 @@
           <a:p>
             <a:pPr>
               <a:spcAft>
-                <a:spcPts val="800"/>
+                <a:spcPts val="700"/>
               </a:spcAft>
-              <a:defRPr sz="1300">
-                <a:solidFill>
-                  <a:srgbClr val="1E293B"/>
-                </a:solidFill>
-              </a:defRPr>
-            </a:pPr>
-            <a:r>
-              <a:t>   Station monitors signal energy while transmitting. If signal energy exceeds normal threshold, collision detected $\implies$ abort immediately and transmit a 32-bit Jam Signal.</a:t>
+              <a:defRPr sz="1250">
+                <a:solidFill>
+                  <a:srgbClr val="0F172A"/>
+                </a:solidFill>
+              </a:defRPr>
+            </a:pPr>
+            <a:r>
+              <a:t>   Node continuously monitors voltage/energy on wire while transmitting. If signal amplitude exceeds collision threshold, collision is detected immediately!</a:t>
             </a:r>
           </a:p>
           <a:p>
@@ -4024,29 +4228,29 @@
               <a:spcAft>
                 <a:spcPts val="200"/>
               </a:spcAft>
-              <a:defRPr b="1" sz="1500">
+              <a:defRPr b="1" sz="1450">
                 <a:solidFill>
                   <a:srgbClr val="0F1E4A"/>
                 </a:solidFill>
               </a:defRPr>
             </a:pPr>
             <a:r>
-              <a:t>• Binary Exponential Backoff Algorithm</a:t>
+              <a:t>• Jam Signal &amp; Abort</a:t>
             </a:r>
           </a:p>
           <a:p>
             <a:pPr>
               <a:spcAft>
-                <a:spcPts val="800"/>
+                <a:spcPts val="700"/>
               </a:spcAft>
-              <a:defRPr sz="1300">
-                <a:solidFill>
-                  <a:srgbClr val="1E293B"/>
-                </a:solidFill>
-              </a:defRPr>
-            </a:pPr>
-            <a:r>
-              <a:t>   After $n$-th collision ($1 \le n \le 10$), choose random slot delay $k \in [0, 2^n - 1]$. Wait time $= k \times 51.2\,\mu\text{s}$. Abort if $n = 16$.</a:t>
+              <a:defRPr sz="1250">
+                <a:solidFill>
+                  <a:srgbClr val="0F172A"/>
+                </a:solidFill>
+              </a:defRPr>
+            </a:pPr>
+            <a:r>
+              <a:t>   Upon detecting collision, node aborts transmission immediately and broadcasts a 32-48 bit **Jam Signal** to ensure all other nodes detect the collision.</a:t>
             </a:r>
           </a:p>
           <a:p>
@@ -4054,29 +4258,59 @@
               <a:spcAft>
                 <a:spcPts val="200"/>
               </a:spcAft>
-              <a:defRPr b="1" sz="1500">
+              <a:defRPr b="1" sz="1450">
                 <a:solidFill>
                   <a:srgbClr val="0F1E4A"/>
                 </a:solidFill>
               </a:defRPr>
             </a:pPr>
             <a:r>
-              <a:t>• Minimum Frame Size Condition</a:t>
+              <a:t>• Minimum Frame Size Constraint ($L_{min}$)</a:t>
             </a:r>
           </a:p>
           <a:p>
             <a:pPr>
               <a:spcAft>
-                <a:spcPts val="800"/>
+                <a:spcPts val="700"/>
               </a:spcAft>
-              <a:defRPr sz="1300">
-                <a:solidFill>
-                  <a:srgbClr val="1E293B"/>
-                </a:solidFill>
-              </a:defRPr>
-            </a:pPr>
-            <a:r>
-              <a:t>   Sender must transmit for at least $2 \times T_{prop}$ to detect collisions before transmission finishes: $T_{trans} \ge 2 \times T_{prop} \implies L_{min} = 2 \times T_{prop} \times \text{Bandwidth}$ (64 Bytes in 10 Mbps Ethernet).</a:t>
+              <a:defRPr sz="1250">
+                <a:solidFill>
+                  <a:srgbClr val="0F172A"/>
+                </a:solidFill>
+              </a:defRPr>
+            </a:pPr>
+            <a:r>
+              <a:t>   To ensure a sender does not finish transmitting before collision signal propagates back: $T_{frame} \ge 2 \times T_{prop} \implies \frac{L_{min}}{R} \ge 2 \cdot \frac{d}{s} \implies L_{min} = 2 \times T_{prop} \times R$.</a:t>
+            </a:r>
+          </a:p>
+          <a:p>
+            <a:pPr>
+              <a:spcAft>
+                <a:spcPts val="200"/>
+              </a:spcAft>
+              <a:defRPr b="1" sz="1450">
+                <a:solidFill>
+                  <a:srgbClr val="0F1E4A"/>
+                </a:solidFill>
+              </a:defRPr>
+            </a:pPr>
+            <a:r>
+              <a:t>• Binary Exponential Backoff (BEB)</a:t>
+            </a:r>
+          </a:p>
+          <a:p>
+            <a:pPr>
+              <a:spcAft>
+                <a:spcPts val="700"/>
+              </a:spcAft>
+              <a:defRPr sz="1250">
+                <a:solidFill>
+                  <a:srgbClr val="0F172A"/>
+                </a:solidFill>
+              </a:defRPr>
+            </a:pPr>
+            <a:r>
+              <a:t>   After $k$-th collision ($k \le 10$), node picks random wait slot $r \in \{0, 1, 2, \dots, 2^k - 1\}$ and waits $r \times 512$ bit times. Aborts after 16 consecutive collisions.</a:t>
             </a:r>
           </a:p>
         </p:txBody>
@@ -4089,14 +4323,14 @@
         </p:nvSpPr>
         <p:spPr>
           <a:xfrm>
-            <a:off x="7955279" y="1280160"/>
-            <a:ext cx="3566160" cy="4846320"/>
+            <a:off x="7955279" y="1234440"/>
+            <a:ext cx="3566160" cy="4892040"/>
           </a:xfrm>
           <a:prstGeom prst="roundRect">
             <a:avLst/>
           </a:prstGeom>
           <a:solidFill>
-            <a:srgbClr val="F1F5F9"/>
+            <a:srgbClr val="F8FAFC"/>
           </a:solidFill>
           <a:ln w="19050">
             <a:solidFill>
@@ -4134,7 +4368,7 @@
         </p:nvSpPr>
         <p:spPr>
           <a:xfrm>
-            <a:off x="8138160" y="1417320"/>
+            <a:off x="8138160" y="1371600"/>
             <a:ext cx="3200400" cy="4572000"/>
           </a:xfrm>
           <a:prstGeom prst="rect">
@@ -4159,7 +4393,7 @@
               </a:defRPr>
             </a:pPr>
             <a:r>
-              <a:t>CSMA/CD Key Formulas</a:t>
+              <a:t>CSMA/CD Summary</a:t>
             </a:r>
           </a:p>
           <a:p>
@@ -4169,12 +4403,12 @@
               </a:spcAft>
               <a:defRPr sz="1200">
                 <a:solidFill>
-                  <a:srgbClr val="1E293B"/>
-                </a:solidFill>
-              </a:defRPr>
-            </a:pPr>
-            <a:r>
-              <a:t>→ Backoff Range: k in [0, 2^n - 1]</a:t>
+                  <a:srgbClr val="0F172A"/>
+                </a:solidFill>
+              </a:defRPr>
+            </a:pPr>
+            <a:r>
+              <a:t>→ 1-persistent sense</a:t>
             </a:r>
           </a:p>
           <a:p>
@@ -4184,12 +4418,12 @@
               </a:spcAft>
               <a:defRPr sz="1200">
                 <a:solidFill>
-                  <a:srgbClr val="1E293B"/>
-                </a:solidFill>
-              </a:defRPr>
-            </a:pPr>
-            <a:r>
-              <a:t>→ Slot Time: 51.2 microseconds</a:t>
+                  <a:srgbClr val="0F172A"/>
+                </a:solidFill>
+              </a:defRPr>
+            </a:pPr>
+            <a:r>
+              <a:t>→ Jam signal on collision</a:t>
             </a:r>
           </a:p>
           <a:p>
@@ -4199,12 +4433,12 @@
               </a:spcAft>
               <a:defRPr sz="1200">
                 <a:solidFill>
-                  <a:srgbClr val="1E293B"/>
-                </a:solidFill>
-              </a:defRPr>
-            </a:pPr>
-            <a:r>
-              <a:t>→ Min Frame Length = 2 * d_prop * Rate</a:t>
+                  <a:srgbClr val="0F172A"/>
+                </a:solidFill>
+              </a:defRPr>
+            </a:pPr>
+            <a:r>
+              <a:t>→ L_min = 2 * t_prop * R</a:t>
             </a:r>
           </a:p>
           <a:p>
@@ -4214,12 +4448,12 @@
               </a:spcAft>
               <a:defRPr sz="1200">
                 <a:solidFill>
-                  <a:srgbClr val="1E293B"/>
-                </a:solidFill>
-              </a:defRPr>
-            </a:pPr>
-            <a:r>
-              <a:t>→ Standard Ethernet Min Frame = 64 Bytes</a:t>
+                  <a:srgbClr val="0F172A"/>
+                </a:solidFill>
+              </a:defRPr>
+            </a:pPr>
+            <a:r>
+              <a:t>→ Standard Ethernet L_min = 64 Bytes (512 bits)</a:t>
             </a:r>
           </a:p>
           <a:p>
@@ -4229,12 +4463,12 @@
               </a:spcAft>
               <a:defRPr sz="1200">
                 <a:solidFill>
-                  <a:srgbClr val="1E293B"/>
-                </a:solidFill>
-              </a:defRPr>
-            </a:pPr>
-            <a:r>
-              <a:t>→ Jam Signal: 32 to 48 bits</a:t>
+                  <a:srgbClr val="0F172A"/>
+                </a:solidFill>
+              </a:defRPr>
+            </a:pPr>
+            <a:r>
+              <a:t>→ Backoff range: [0, 2^k - 1]</a:t>
             </a:r>
           </a:p>
         </p:txBody>
@@ -4247,8 +4481,8 @@
         </p:nvSpPr>
         <p:spPr>
           <a:xfrm>
-            <a:off x="731520" y="6309360"/>
-            <a:ext cx="10789920" cy="365760"/>
+            <a:off x="731520" y="6327648"/>
+            <a:ext cx="10789920" cy="320040"/>
           </a:xfrm>
           <a:prstGeom prst="rect">
             <a:avLst/>
@@ -4270,6 +4504,41 @@
             </a:pPr>
             <a:r>
               <a:t>PCCST501 Computer Networks | KTU 2024 Scheme | Prof. Anju Markose | Assistant Professor, Dept. of CSE | VJCET</a:t>
+            </a:r>
+          </a:p>
+        </p:txBody>
+      </p:sp>
+      <p:sp>
+        <p:nvSpPr>
+          <p:cNvPr id="10" name="TextBox 9"/>
+          <p:cNvSpPr txBox="1"/>
+          <p:nvPr/>
+        </p:nvSpPr>
+        <p:spPr>
+          <a:xfrm>
+            <a:off x="6858000" y="6327648"/>
+            <a:ext cx="4572000" cy="320040"/>
+          </a:xfrm>
+          <a:prstGeom prst="rect">
+            <a:avLst/>
+          </a:prstGeom>
+          <a:noFill/>
+        </p:spPr>
+        <p:txBody>
+          <a:bodyPr wrap="none">
+            <a:spAutoFit/>
+          </a:bodyPr>
+          <a:lstStyle/>
+          <a:p>
+            <a:pPr algn="r">
+              <a:defRPr sz="950">
+                <a:solidFill>
+                  <a:srgbClr val="64748B"/>
+                </a:solidFill>
+              </a:defRPr>
+            </a:pPr>
+            <a:r>
+              <a:t>Dept. of CSE, VJCET</a:t>
             </a:r>
           </a:p>
         </p:txBody>
@@ -4401,14 +4670,14 @@
           <a:lstStyle/>
           <a:p>
             <a:pPr>
-              <a:defRPr b="1" sz="2300">
+              <a:defRPr b="1" sz="2200">
                 <a:solidFill>
                   <a:srgbClr val="F8FAFC"/>
                 </a:solidFill>
               </a:defRPr>
             </a:pPr>
             <a:r>
-              <a:t>3.3.3 Channelization &amp; CDMA (Code Division Multiple Access)</a:t>
+              <a:t>3.3.3 Worked KTU Numerical: CSMA/CD Minimum Frame Size</a:t>
             </a:r>
           </a:p>
         </p:txBody>
@@ -4443,204 +4712,31 @@
               </a:defRPr>
             </a:pPr>
             <a:r>
-              <a:t>M3.3 CHANNELIZATION</a:t>
-            </a:r>
-          </a:p>
-        </p:txBody>
-      </p:sp>
-      <p:sp>
-        <p:nvSpPr>
-          <p:cNvPr id="6" name="TextBox 5"/>
-          <p:cNvSpPr txBox="1"/>
-          <p:nvPr/>
-        </p:nvSpPr>
-        <p:spPr>
-          <a:xfrm>
-            <a:off x="731520" y="1280160"/>
-            <a:ext cx="6858000" cy="4937760"/>
-          </a:xfrm>
-          <a:prstGeom prst="rect">
-            <a:avLst/>
-          </a:prstGeom>
-          <a:noFill/>
-        </p:spPr>
-        <p:txBody>
-          <a:bodyPr wrap="square">
-            <a:spAutoFit/>
-          </a:bodyPr>
-          <a:lstStyle/>
-          <a:p>
-            <a:pPr>
-              <a:spcAft>
-                <a:spcPts val="200"/>
-              </a:spcAft>
-              <a:defRPr b="1" sz="1500">
-                <a:solidFill>
-                  <a:srgbClr val="0F1E4A"/>
-                </a:solidFill>
-              </a:defRPr>
-            </a:pPr>
-            <a:r>
-              <a:t>• Channelization Principles</a:t>
-            </a:r>
-          </a:p>
-          <a:p>
-            <a:pPr>
-              <a:spcAft>
-                <a:spcPts val="800"/>
-              </a:spcAft>
-              <a:defRPr sz="1300">
-                <a:solidFill>
-                  <a:srgbClr val="1E293B"/>
-                </a:solidFill>
-              </a:defRPr>
-            </a:pPr>
-            <a:r>
-              <a:t>   Shared bandwidth divided among stations: FDMA (Frequency bands), TDMA (Time slots), and CDMA (Orthogonal Codes).</a:t>
-            </a:r>
-          </a:p>
-          <a:p>
-            <a:pPr>
-              <a:spcAft>
-                <a:spcPts val="200"/>
-              </a:spcAft>
-              <a:defRPr b="1" sz="1500">
-                <a:solidFill>
-                  <a:srgbClr val="0F1E4A"/>
-                </a:solidFill>
-              </a:defRPr>
-            </a:pPr>
-            <a:r>
-              <a:t>• CDMA Fundamentals</a:t>
-            </a:r>
-          </a:p>
-          <a:p>
-            <a:pPr>
-              <a:spcAft>
-                <a:spcPts val="800"/>
-              </a:spcAft>
-              <a:defRPr sz="1300">
-                <a:solidFill>
-                  <a:srgbClr val="1E293B"/>
-                </a:solidFill>
-              </a:defRPr>
-            </a:pPr>
-            <a:r>
-              <a:t>   All stations transmit simultaneously across the entire frequency band. Signals are separated using orthogonal chip sequences.</a:t>
-            </a:r>
-          </a:p>
-          <a:p>
-            <a:pPr>
-              <a:spcAft>
-                <a:spcPts val="200"/>
-              </a:spcAft>
-              <a:defRPr b="1" sz="1500">
-                <a:solidFill>
-                  <a:srgbClr val="0F1E4A"/>
-                </a:solidFill>
-              </a:defRPr>
-            </a:pPr>
-            <a:r>
-              <a:t>• Orthogonal Chip Sequences (Walsh Codes)</a:t>
-            </a:r>
-          </a:p>
-          <a:p>
-            <a:pPr>
-              <a:spcAft>
-                <a:spcPts val="800"/>
-              </a:spcAft>
-              <a:defRPr sz="1300">
-                <a:solidFill>
-                  <a:srgbClr val="1E293B"/>
-                </a:solidFill>
-              </a:defRPr>
-            </a:pPr>
-            <a:r>
-              <a:t>   Each station is assigned an $N$-bit orthogonal chip code $C_i$ where $C_i \cdot C_j = 0$ (if $i \neq j$) and $C_i \cdot C_i = 1$.</a:t>
-            </a:r>
-          </a:p>
-          <a:p>
-            <a:pPr>
-              <a:spcAft>
-                <a:spcPts val="200"/>
-              </a:spcAft>
-              <a:defRPr b="1" sz="1500">
-                <a:solidFill>
-                  <a:srgbClr val="0F1E4A"/>
-                </a:solidFill>
-              </a:defRPr>
-            </a:pPr>
-            <a:r>
-              <a:t>• CDMA Encoding</a:t>
-            </a:r>
-          </a:p>
-          <a:p>
-            <a:pPr>
-              <a:spcAft>
-                <a:spcPts val="800"/>
-              </a:spcAft>
-              <a:defRPr sz="1300">
-                <a:solidFill>
-                  <a:srgbClr val="1E293B"/>
-                </a:solidFill>
-              </a:defRPr>
-            </a:pPr>
-            <a:r>
-              <a:t>   To send bit 1: transmit code $C_i$. To send bit 0: transmit inverse $-C_i$. If silent: transmit 0.</a:t>
-            </a:r>
-          </a:p>
-          <a:p>
-            <a:pPr>
-              <a:spcAft>
-                <a:spcPts val="200"/>
-              </a:spcAft>
-              <a:defRPr b="1" sz="1500">
-                <a:solidFill>
-                  <a:srgbClr val="0F1E4A"/>
-                </a:solidFill>
-              </a:defRPr>
-            </a:pPr>
-            <a:r>
-              <a:t>• CDMA Decoding</a:t>
-            </a:r>
-          </a:p>
-          <a:p>
-            <a:pPr>
-              <a:spcAft>
-                <a:spcPts val="800"/>
-              </a:spcAft>
-              <a:defRPr sz="1300">
-                <a:solidFill>
-                  <a:srgbClr val="1E293B"/>
-                </a:solidFill>
-              </a:defRPr>
-            </a:pPr>
-            <a:r>
-              <a:t>   Receiver multiplies composite incoming signal $S$ by desired station's code $C_i$: $S \cdot C_i = (d_1 C_1 + d_2 C_2 + \dots) \cdot C_i = d_i (C_i \cdot C_i) = d_i$. All other signals cancel to 0!</a:t>
-            </a:r>
-          </a:p>
-        </p:txBody>
-      </p:sp>
-      <p:sp>
-        <p:nvSpPr>
-          <p:cNvPr id="7" name="Rounded Rectangle 6"/>
+              <a:t>M3.3 CSMA/CD NUMERICAL</a:t>
+            </a:r>
+          </a:p>
+        </p:txBody>
+      </p:sp>
+      <p:sp>
+        <p:nvSpPr>
+          <p:cNvPr id="6" name="Rounded Rectangle 5"/>
           <p:cNvSpPr/>
           <p:nvPr/>
         </p:nvSpPr>
         <p:spPr>
           <a:xfrm>
-            <a:off x="7955279" y="1280160"/>
-            <a:ext cx="3566160" cy="4846320"/>
+            <a:off x="731520" y="1234440"/>
+            <a:ext cx="5486400" cy="4892040"/>
           </a:xfrm>
           <a:prstGeom prst="roundRect">
             <a:avLst/>
           </a:prstGeom>
           <a:solidFill>
-            <a:srgbClr val="F1F5F9"/>
+            <a:srgbClr val="F8FAFC"/>
           </a:solidFill>
           <a:ln w="19050">
             <a:solidFill>
-              <a:srgbClr val="0E7490"/>
+              <a:srgbClr val="0F1E4A"/>
             </a:solidFill>
           </a:ln>
         </p:spPr>
@@ -4668,14 +4764,14 @@
       </p:sp>
       <p:sp>
         <p:nvSpPr>
-          <p:cNvPr id="8" name="TextBox 7"/>
+          <p:cNvPr id="7" name="TextBox 6"/>
           <p:cNvSpPr txBox="1"/>
           <p:nvPr/>
         </p:nvSpPr>
         <p:spPr>
           <a:xfrm>
-            <a:off x="8138160" y="1417320"/>
-            <a:ext cx="3200400" cy="4572000"/>
+            <a:off x="914400" y="1371600"/>
+            <a:ext cx="5120640" cy="4572000"/>
           </a:xfrm>
           <a:prstGeom prst="rect">
             <a:avLst/>
@@ -4690,16 +4786,746 @@
           <a:p>
             <a:pPr>
               <a:spcAft>
+                <a:spcPts val="800"/>
+              </a:spcAft>
+              <a:defRPr b="1" sz="1450">
+                <a:solidFill>
+                  <a:srgbClr val="0F1E4A"/>
+                </a:solidFill>
+              </a:defRPr>
+            </a:pPr>
+            <a:r>
+              <a:t>📌 KTU Numerical Problem Statement</a:t>
+            </a:r>
+          </a:p>
+          <a:p>
+            <a:pPr>
+              <a:spcAft>
+                <a:spcPts val="1400"/>
+              </a:spcAft>
+              <a:defRPr sz="1250">
+                <a:solidFill>
+                  <a:srgbClr val="0F172A"/>
+                </a:solidFill>
+              </a:defRPr>
+            </a:pPr>
+            <a:r>
+              <a:t>A 1 Gbps Ethernet LAN runs over a 1 km fiber link with propagation speed s = 2 * 10^8 m/s. Calculate the minimum frame size required for proper collision detection. If transmission rate is increased to 10 Gbps over the same link, what must the new minimum frame size be?</a:t>
+            </a:r>
+          </a:p>
+          <a:p>
+            <a:pPr>
+              <a:spcAft>
+                <a:spcPts val="600"/>
+              </a:spcAft>
+              <a:defRPr b="1" sz="1350">
+                <a:solidFill>
+                  <a:srgbClr val="0E7490"/>
+                </a:solidFill>
+              </a:defRPr>
+            </a:pPr>
+            <a:r>
+              <a:t>📐 Governing Formulas &amp; Principles:</a:t>
+            </a:r>
+          </a:p>
+          <a:p>
+            <a:pPr>
+              <a:spcAft>
+                <a:spcPts val="400"/>
+              </a:spcAft>
+              <a:defRPr sz="1200">
+                <a:solidFill>
+                  <a:srgbClr val="0F172A"/>
+                </a:solidFill>
+              </a:defRPr>
+            </a:pPr>
+            <a:r>
+              <a:t>• L_min = 2 * t_prop * R</a:t>
+            </a:r>
+          </a:p>
+          <a:p>
+            <a:pPr>
+              <a:spcAft>
+                <a:spcPts val="400"/>
+              </a:spcAft>
+              <a:defRPr sz="1200">
+                <a:solidFill>
+                  <a:srgbClr val="0F172A"/>
+                </a:solidFill>
+              </a:defRPr>
+            </a:pPr>
+            <a:r>
+              <a:t>• t_prop = d / s = 1000 m / (2 * 10^8 m/s) = 5 * 10^-6 s = 5 microseconds.</a:t>
+            </a:r>
+          </a:p>
+          <a:p>
+            <a:pPr>
+              <a:spcAft>
+                <a:spcPts val="400"/>
+              </a:spcAft>
+              <a:defRPr sz="1200">
+                <a:solidFill>
+                  <a:srgbClr val="0F172A"/>
+                </a:solidFill>
+              </a:defRPr>
+            </a:pPr>
+            <a:r>
+              <a:t>• Round-trip propagation time 2 * t_prop = 10 microseconds = 10^-5 seconds.</a:t>
+            </a:r>
+          </a:p>
+          <a:p>
+            <a:pPr>
+              <a:spcAft>
+                <a:spcPts val="400"/>
+              </a:spcAft>
+              <a:defRPr sz="1200">
+                <a:solidFill>
+                  <a:srgbClr val="0F172A"/>
+                </a:solidFill>
+              </a:defRPr>
+            </a:pPr>
+            <a:r>
+              <a:t>• L_min = 2 * t_prop * R (bits).</a:t>
+            </a:r>
+          </a:p>
+        </p:txBody>
+      </p:sp>
+      <p:sp>
+        <p:nvSpPr>
+          <p:cNvPr id="8" name="Rounded Rectangle 7"/>
+          <p:cNvSpPr/>
+          <p:nvPr/>
+        </p:nvSpPr>
+        <p:spPr>
+          <a:xfrm>
+            <a:off x="6492240" y="1234440"/>
+            <a:ext cx="5029200" cy="4892040"/>
+          </a:xfrm>
+          <a:prstGeom prst="roundRect">
+            <a:avLst/>
+          </a:prstGeom>
+          <a:solidFill>
+            <a:srgbClr val="ECFDF5"/>
+          </a:solidFill>
+          <a:ln w="19050">
+            <a:solidFill>
+              <a:srgbClr val="10B981"/>
+            </a:solidFill>
+          </a:ln>
+        </p:spPr>
+        <p:style>
+          <a:lnRef idx="1">
+            <a:schemeClr val="accent1"/>
+          </a:lnRef>
+          <a:fillRef idx="3">
+            <a:schemeClr val="accent1"/>
+          </a:fillRef>
+          <a:effectRef idx="2">
+            <a:schemeClr val="accent1"/>
+          </a:effectRef>
+          <a:fontRef idx="minor">
+            <a:schemeClr val="lt1"/>
+          </a:fontRef>
+        </p:style>
+        <p:txBody>
+          <a:bodyPr rtlCol="0" anchor="ctr"/>
+          <a:lstStyle/>
+          <a:p>
+            <a:pPr algn="ctr"/>
+          </a:p>
+        </p:txBody>
+      </p:sp>
+      <p:sp>
+        <p:nvSpPr>
+          <p:cNvPr id="9" name="TextBox 8"/>
+          <p:cNvSpPr txBox="1"/>
+          <p:nvPr/>
+        </p:nvSpPr>
+        <p:spPr>
+          <a:xfrm>
+            <a:off x="6675120" y="1371600"/>
+            <a:ext cx="4663440" cy="4572000"/>
+          </a:xfrm>
+          <a:prstGeom prst="rect">
+            <a:avLst/>
+          </a:prstGeom>
+          <a:noFill/>
+        </p:spPr>
+        <p:txBody>
+          <a:bodyPr wrap="square">
+            <a:spAutoFit/>
+          </a:bodyPr>
+          <a:lstStyle/>
+          <a:p>
+            <a:pPr>
+              <a:spcAft>
+                <a:spcPts val="800"/>
+              </a:spcAft>
+              <a:defRPr b="1" sz="1450">
+                <a:solidFill>
+                  <a:srgbClr val="047857"/>
+                </a:solidFill>
+              </a:defRPr>
+            </a:pPr>
+            <a:r>
+              <a:t>📝 Step-by-Step Derivation &amp; Solution</a:t>
+            </a:r>
+          </a:p>
+          <a:p>
+            <a:pPr>
+              <a:spcAft>
+                <a:spcPts val="500"/>
+              </a:spcAft>
+              <a:defRPr sz="1200">
+                <a:solidFill>
+                  <a:srgbClr val="0F172A"/>
+                </a:solidFill>
+              </a:defRPr>
+            </a:pPr>
+            <a:r>
+              <a:t>Step 1: For R = 1 Gbps = 10^9 bps:</a:t>
+            </a:r>
+          </a:p>
+          <a:p>
+            <a:pPr>
+              <a:spcAft>
+                <a:spcPts val="500"/>
+              </a:spcAft>
+              <a:defRPr sz="1200">
+                <a:solidFill>
+                  <a:srgbClr val="0F172A"/>
+                </a:solidFill>
+              </a:defRPr>
+            </a:pPr>
+            <a:r>
+              <a:t>Step 2: L_min = 10^-5 s * 10^9 bps = 10,000 bits = 10,000 / 8 = 1250 Bytes.</a:t>
+            </a:r>
+          </a:p>
+          <a:p>
+            <a:pPr>
+              <a:spcAft>
+                <a:spcPts val="500"/>
+              </a:spcAft>
+              <a:defRPr sz="1200">
+                <a:solidFill>
+                  <a:srgbClr val="0F172A"/>
+                </a:solidFill>
+              </a:defRPr>
+            </a:pPr>
+            <a:r>
+              <a:t>Step 3: For R = 10 Gbps = 10^10 bps:</a:t>
+            </a:r>
+          </a:p>
+          <a:p>
+            <a:pPr>
+              <a:spcAft>
+                <a:spcPts val="500"/>
+              </a:spcAft>
+              <a:defRPr sz="1200">
+                <a:solidFill>
+                  <a:srgbClr val="0F172A"/>
+                </a:solidFill>
+              </a:defRPr>
+            </a:pPr>
+            <a:r>
+              <a:t>Step 4: L_min = 10^-5 s * 10^10 bps = 100,000 bits = 12,500 Bytes (12.5 KB).</a:t>
+            </a:r>
+          </a:p>
+          <a:p>
+            <a:pPr>
+              <a:spcAft>
+                <a:spcPts val="500"/>
+              </a:spcAft>
+              <a:defRPr sz="1200">
+                <a:solidFill>
+                  <a:srgbClr val="0F172A"/>
+                </a:solidFill>
+              </a:defRPr>
+            </a:pPr>
+            <a:r>
+              <a:t>Step 5: Conclusion: At 10 Gbps, minimum frame size becomes unfeasibly large; hence 10 Gigabit Ethernet mandates full-duplex point-to-point links (disabling CSMA/CD entirely).</a:t>
+            </a:r>
+          </a:p>
+          <a:p>
+            <a:pPr>
+              <a:spcAft>
+                <a:spcPts val="800"/>
+              </a:spcAft>
+              <a:defRPr b="1" sz="1300">
+                <a:solidFill>
+                  <a:srgbClr val="047857"/>
+                </a:solidFill>
+              </a:defRPr>
+            </a:pPr>
+            <a:r>
+              <a:t>✅ FINAL ANSWER: 1 Gbps: L_min = 1250 Bytes | 10 Gbps: L_min = 12,500 Bytes</a:t>
+            </a:r>
+          </a:p>
+          <a:p>
+            <a:pPr>
+              <a:defRPr sz="1100">
+                <a:solidFill>
+                  <a:srgbClr val="64748B"/>
+                </a:solidFill>
+              </a:defRPr>
+            </a:pPr>
+            <a:r>
+              <a:t>💡 Exam Tip: CSMA/CD is only applicable on half-duplex shared media; full-duplex switched Ethernet does not require CSMA/CD.</a:t>
+            </a:r>
+          </a:p>
+        </p:txBody>
+      </p:sp>
+      <p:sp>
+        <p:nvSpPr>
+          <p:cNvPr id="10" name="TextBox 9"/>
+          <p:cNvSpPr txBox="1"/>
+          <p:nvPr/>
+        </p:nvSpPr>
+        <p:spPr>
+          <a:xfrm>
+            <a:off x="731520" y="6327648"/>
+            <a:ext cx="10789920" cy="320040"/>
+          </a:xfrm>
+          <a:prstGeom prst="rect">
+            <a:avLst/>
+          </a:prstGeom>
+          <a:noFill/>
+        </p:spPr>
+        <p:txBody>
+          <a:bodyPr wrap="none">
+            <a:spAutoFit/>
+          </a:bodyPr>
+          <a:lstStyle/>
+          <a:p>
+            <a:pPr>
+              <a:defRPr sz="950">
+                <a:solidFill>
+                  <a:srgbClr val="64748B"/>
+                </a:solidFill>
+              </a:defRPr>
+            </a:pPr>
+            <a:r>
+              <a:t>PCCST501 Computer Networks | KTU 2024 Scheme | Prof. Anju Markose | Assistant Professor, Dept. of CSE | VJCET</a:t>
+            </a:r>
+          </a:p>
+        </p:txBody>
+      </p:sp>
+      <p:sp>
+        <p:nvSpPr>
+          <p:cNvPr id="11" name="TextBox 10"/>
+          <p:cNvSpPr txBox="1"/>
+          <p:nvPr/>
+        </p:nvSpPr>
+        <p:spPr>
+          <a:xfrm>
+            <a:off x="6858000" y="6327648"/>
+            <a:ext cx="4572000" cy="320040"/>
+          </a:xfrm>
+          <a:prstGeom prst="rect">
+            <a:avLst/>
+          </a:prstGeom>
+          <a:noFill/>
+        </p:spPr>
+        <p:txBody>
+          <a:bodyPr wrap="none">
+            <a:spAutoFit/>
+          </a:bodyPr>
+          <a:lstStyle/>
+          <a:p>
+            <a:pPr algn="r">
+              <a:defRPr sz="950">
+                <a:solidFill>
+                  <a:srgbClr val="64748B"/>
+                </a:solidFill>
+              </a:defRPr>
+            </a:pPr>
+            <a:r>
+              <a:t>Dept. of CSE, VJCET</a:t>
+            </a:r>
+          </a:p>
+        </p:txBody>
+      </p:sp>
+    </p:spTree>
+  </p:cSld>
+  <p:clrMapOvr>
+    <a:masterClrMapping/>
+  </p:clrMapOvr>
+</p:sld>
+</file>
+
+<file path=ppt/slides/slide5.xml><?xml version="1.0" encoding="utf-8"?>
+<p:sld xmlns:a="http://schemas.openxmlformats.org/drawingml/2006/main" xmlns:p="http://schemas.openxmlformats.org/presentationml/2006/main" xmlns:r="http://schemas.openxmlformats.org/officeDocument/2006/relationships">
+  <p:cSld>
+    <p:spTree>
+      <p:nvGrpSpPr>
+        <p:cNvPr id="1" name=""/>
+        <p:cNvGrpSpPr/>
+        <p:nvPr/>
+      </p:nvGrpSpPr>
+      <p:grpSpPr/>
+      <p:sp>
+        <p:nvSpPr>
+          <p:cNvPr id="2" name="Rectangle 1"/>
+          <p:cNvSpPr/>
+          <p:nvPr/>
+        </p:nvSpPr>
+        <p:spPr>
+          <a:xfrm>
+            <a:off x="0" y="0"/>
+            <a:ext cx="12191695" cy="1005840"/>
+          </a:xfrm>
+          <a:prstGeom prst="rect">
+            <a:avLst/>
+          </a:prstGeom>
+          <a:solidFill>
+            <a:srgbClr val="0F1E4A"/>
+          </a:solidFill>
+          <a:ln>
+            <a:noFill/>
+          </a:ln>
+        </p:spPr>
+        <p:style>
+          <a:lnRef idx="1">
+            <a:schemeClr val="accent1"/>
+          </a:lnRef>
+          <a:fillRef idx="3">
+            <a:schemeClr val="accent1"/>
+          </a:fillRef>
+          <a:effectRef idx="2">
+            <a:schemeClr val="accent1"/>
+          </a:effectRef>
+          <a:fontRef idx="minor">
+            <a:schemeClr val="lt1"/>
+          </a:fontRef>
+        </p:style>
+        <p:txBody>
+          <a:bodyPr rtlCol="0" anchor="ctr"/>
+          <a:lstStyle/>
+          <a:p>
+            <a:pPr algn="ctr"/>
+          </a:p>
+        </p:txBody>
+      </p:sp>
+      <p:sp>
+        <p:nvSpPr>
+          <p:cNvPr id="3" name="Rectangle 2"/>
+          <p:cNvSpPr/>
+          <p:nvPr/>
+        </p:nvSpPr>
+        <p:spPr>
+          <a:xfrm>
+            <a:off x="0" y="969264"/>
+            <a:ext cx="12191695" cy="36576"/>
+          </a:xfrm>
+          <a:prstGeom prst="rect">
+            <a:avLst/>
+          </a:prstGeom>
+          <a:solidFill>
+            <a:srgbClr val="D97706"/>
+          </a:solidFill>
+          <a:ln>
+            <a:noFill/>
+          </a:ln>
+        </p:spPr>
+        <p:style>
+          <a:lnRef idx="1">
+            <a:schemeClr val="accent1"/>
+          </a:lnRef>
+          <a:fillRef idx="3">
+            <a:schemeClr val="accent1"/>
+          </a:fillRef>
+          <a:effectRef idx="2">
+            <a:schemeClr val="accent1"/>
+          </a:effectRef>
+          <a:fontRef idx="minor">
+            <a:schemeClr val="lt1"/>
+          </a:fontRef>
+        </p:style>
+        <p:txBody>
+          <a:bodyPr rtlCol="0" anchor="ctr"/>
+          <a:lstStyle/>
+          <a:p>
+            <a:pPr algn="ctr"/>
+          </a:p>
+        </p:txBody>
+      </p:sp>
+      <p:sp>
+        <p:nvSpPr>
+          <p:cNvPr id="4" name="TextBox 3"/>
+          <p:cNvSpPr txBox="1"/>
+          <p:nvPr/>
+        </p:nvSpPr>
+        <p:spPr>
+          <a:xfrm>
+            <a:off x="731520" y="164592"/>
+            <a:ext cx="8412480" cy="685800"/>
+          </a:xfrm>
+          <a:prstGeom prst="rect">
+            <a:avLst/>
+          </a:prstGeom>
+          <a:noFill/>
+        </p:spPr>
+        <p:txBody>
+          <a:bodyPr wrap="none">
+            <a:spAutoFit/>
+          </a:bodyPr>
+          <a:lstStyle/>
+          <a:p>
+            <a:pPr>
+              <a:defRPr b="1" sz="2100">
+                <a:solidFill>
+                  <a:srgbClr val="F8FAFC"/>
+                </a:solidFill>
+              </a:defRPr>
+            </a:pPr>
+            <a:r>
+              <a:t>🎯 Exam Booster &amp; Review: Multiple Access Protocols</a:t>
+            </a:r>
+          </a:p>
+        </p:txBody>
+      </p:sp>
+      <p:sp>
+        <p:nvSpPr>
+          <p:cNvPr id="5" name="TextBox 4"/>
+          <p:cNvSpPr txBox="1"/>
+          <p:nvPr/>
+        </p:nvSpPr>
+        <p:spPr>
+          <a:xfrm>
+            <a:off x="8229600" y="164592"/>
+            <a:ext cx="3291840" cy="685800"/>
+          </a:xfrm>
+          <a:prstGeom prst="rect">
+            <a:avLst/>
+          </a:prstGeom>
+          <a:noFill/>
+        </p:spPr>
+        <p:txBody>
+          <a:bodyPr wrap="none">
+            <a:spAutoFit/>
+          </a:bodyPr>
+          <a:lstStyle/>
+          <a:p>
+            <a:pPr algn="r">
+              <a:defRPr b="1" sz="1300">
+                <a:solidFill>
+                  <a:srgbClr val="D97706"/>
+                </a:solidFill>
+              </a:defRPr>
+            </a:pPr>
+            <a:r>
+              <a:t>M3.3</a:t>
+            </a:r>
+          </a:p>
+        </p:txBody>
+      </p:sp>
+      <p:sp>
+        <p:nvSpPr>
+          <p:cNvPr id="6" name="Rounded Rectangle 5"/>
+          <p:cNvSpPr/>
+          <p:nvPr/>
+        </p:nvSpPr>
+        <p:spPr>
+          <a:xfrm>
+            <a:off x="731520" y="1234440"/>
+            <a:ext cx="5303520" cy="4892040"/>
+          </a:xfrm>
+          <a:prstGeom prst="roundRect">
+            <a:avLst/>
+          </a:prstGeom>
+          <a:solidFill>
+            <a:srgbClr val="FEF3C7"/>
+          </a:solidFill>
+          <a:ln w="19050">
+            <a:solidFill>
+              <a:srgbClr val="D97706"/>
+            </a:solidFill>
+          </a:ln>
+        </p:spPr>
+        <p:style>
+          <a:lnRef idx="1">
+            <a:schemeClr val="accent1"/>
+          </a:lnRef>
+          <a:fillRef idx="3">
+            <a:schemeClr val="accent1"/>
+          </a:fillRef>
+          <a:effectRef idx="2">
+            <a:schemeClr val="accent1"/>
+          </a:effectRef>
+          <a:fontRef idx="minor">
+            <a:schemeClr val="lt1"/>
+          </a:fontRef>
+        </p:style>
+        <p:txBody>
+          <a:bodyPr rtlCol="0" anchor="ctr"/>
+          <a:lstStyle/>
+          <a:p>
+            <a:pPr algn="ctr"/>
+          </a:p>
+        </p:txBody>
+      </p:sp>
+      <p:sp>
+        <p:nvSpPr>
+          <p:cNvPr id="7" name="TextBox 6"/>
+          <p:cNvSpPr txBox="1"/>
+          <p:nvPr/>
+        </p:nvSpPr>
+        <p:spPr>
+          <a:xfrm>
+            <a:off x="914400" y="1371600"/>
+            <a:ext cx="4937760" cy="4572000"/>
+          </a:xfrm>
+          <a:prstGeom prst="rect">
+            <a:avLst/>
+          </a:prstGeom>
+          <a:noFill/>
+        </p:spPr>
+        <p:txBody>
+          <a:bodyPr wrap="square">
+            <a:spAutoFit/>
+          </a:bodyPr>
+          <a:lstStyle/>
+          <a:p>
+            <a:pPr>
+              <a:spcAft>
                 <a:spcPts val="1000"/>
               </a:spcAft>
-              <a:defRPr b="1" sz="1500">
+              <a:defRPr b="1" sz="1450">
+                <a:solidFill>
+                  <a:srgbClr val="D97706"/>
+                </a:solidFill>
+              </a:defRPr>
+            </a:pPr>
+            <a:r>
+              <a:t>📚 KTU High-Yield Questions (K3 Apply)</a:t>
+            </a:r>
+          </a:p>
+          <a:p>
+            <a:pPr>
+              <a:spcAft>
+                <a:spcPts val="700"/>
+              </a:spcAft>
+              <a:defRPr sz="1200">
+                <a:solidFill>
+                  <a:srgbClr val="0F172A"/>
+                </a:solidFill>
+              </a:defRPr>
+            </a:pPr>
+            <a:r>
+              <a:t>Q: Derive the maximum channel throughput for Pure ALOHA ($18.4\%$) and Slotted ALOHA ($36.8\%$) with vulnerable period diagrams. (8 Marks)</a:t>
+            </a:r>
+          </a:p>
+          <a:p>
+            <a:pPr>
+              <a:spcAft>
+                <a:spcPts val="700"/>
+              </a:spcAft>
+              <a:defRPr sz="1200">
+                <a:solidFill>
+                  <a:srgbClr val="0F172A"/>
+                </a:solidFill>
+              </a:defRPr>
+            </a:pPr>
+            <a:r>
+              <a:t>Q: Explain the working of CSMA/CD with the Binary Exponential Backoff (BEB) algorithm and minimum frame size derivation. (8 Marks)</a:t>
+            </a:r>
+          </a:p>
+          <a:p>
+            <a:pPr>
+              <a:spcAft>
+                <a:spcPts val="700"/>
+              </a:spcAft>
+              <a:defRPr sz="1200">
+                <a:solidFill>
+                  <a:srgbClr val="0F172A"/>
+                </a:solidFill>
+              </a:defRPr>
+            </a:pPr>
+            <a:r>
+              <a:t>Q: Explain Code Division Multiple Access (CDMA) using orthogonal Walsh chip sequences with an encoding and decoding example. (7 Marks)</a:t>
+            </a:r>
+          </a:p>
+        </p:txBody>
+      </p:sp>
+      <p:sp>
+        <p:nvSpPr>
+          <p:cNvPr id="8" name="Rounded Rectangle 7"/>
+          <p:cNvSpPr/>
+          <p:nvPr/>
+        </p:nvSpPr>
+        <p:spPr>
+          <a:xfrm>
+            <a:off x="6309360" y="1234440"/>
+            <a:ext cx="5212080" cy="4892040"/>
+          </a:xfrm>
+          <a:prstGeom prst="roundRect">
+            <a:avLst/>
+          </a:prstGeom>
+          <a:solidFill>
+            <a:srgbClr val="EEF2FF"/>
+          </a:solidFill>
+          <a:ln w="19050">
+            <a:solidFill>
+              <a:srgbClr val="0E7490"/>
+            </a:solidFill>
+          </a:ln>
+        </p:spPr>
+        <p:style>
+          <a:lnRef idx="1">
+            <a:schemeClr val="accent1"/>
+          </a:lnRef>
+          <a:fillRef idx="3">
+            <a:schemeClr val="accent1"/>
+          </a:fillRef>
+          <a:effectRef idx="2">
+            <a:schemeClr val="accent1"/>
+          </a:effectRef>
+          <a:fontRef idx="minor">
+            <a:schemeClr val="lt1"/>
+          </a:fontRef>
+        </p:style>
+        <p:txBody>
+          <a:bodyPr rtlCol="0" anchor="ctr"/>
+          <a:lstStyle/>
+          <a:p>
+            <a:pPr algn="ctr"/>
+          </a:p>
+        </p:txBody>
+      </p:sp>
+      <p:sp>
+        <p:nvSpPr>
+          <p:cNvPr id="9" name="TextBox 8"/>
+          <p:cNvSpPr txBox="1"/>
+          <p:nvPr/>
+        </p:nvSpPr>
+        <p:spPr>
+          <a:xfrm>
+            <a:off x="6492240" y="1371600"/>
+            <a:ext cx="4846320" cy="4572000"/>
+          </a:xfrm>
+          <a:prstGeom prst="rect">
+            <a:avLst/>
+          </a:prstGeom>
+          <a:noFill/>
+        </p:spPr>
+        <p:txBody>
+          <a:bodyPr wrap="square">
+            <a:spAutoFit/>
+          </a:bodyPr>
+          <a:lstStyle/>
+          <a:p>
+            <a:pPr>
+              <a:spcAft>
+                <a:spcPts val="1000"/>
+              </a:spcAft>
+              <a:defRPr b="1" sz="1450">
                 <a:solidFill>
                   <a:srgbClr val="0E7490"/>
                 </a:solidFill>
               </a:defRPr>
             </a:pPr>
             <a:r>
-              <a:t>CDMA Properties</a:t>
+              <a:t>💡 Critical Conceptual Takeaways</a:t>
             </a:r>
           </a:p>
           <a:p>
@@ -4709,12 +5535,12 @@
               </a:spcAft>
               <a:defRPr sz="1200">
                 <a:solidFill>
-                  <a:srgbClr val="1E293B"/>
-                </a:solidFill>
-              </a:defRPr>
-            </a:pPr>
-            <a:r>
-              <a:t>→ Inner Product: Ci * Cj = 0 (i != j)</a:t>
+                  <a:srgbClr val="0F172A"/>
+                </a:solidFill>
+              </a:defRPr>
+            </a:pPr>
+            <a:r>
+              <a:t>✔ Slotted ALOHA doubles Pure ALOHA efficiency by eliminating partial frame collisions.</a:t>
             </a:r>
           </a:p>
           <a:p>
@@ -4724,12 +5550,12 @@
               </a:spcAft>
               <a:defRPr sz="1200">
                 <a:solidFill>
-                  <a:srgbClr val="1E293B"/>
-                </a:solidFill>
-              </a:defRPr>
-            </a:pPr>
-            <a:r>
-              <a:t>→ Self Product: Ci * Ci = 1</a:t>
+                  <a:srgbClr val="0F172A"/>
+                </a:solidFill>
+              </a:defRPr>
+            </a:pPr>
+            <a:r>
+              <a:t>✔ Minimum frame size in CSMA/CD guarantees collision detection before transmission ends ($L_{min} = 2 \cdot t_{prop} \cdot R$).</a:t>
             </a:r>
           </a:p>
           <a:p>
@@ -4739,41 +5565,26 @@
               </a:spcAft>
               <a:defRPr sz="1200">
                 <a:solidFill>
-                  <a:srgbClr val="1E293B"/>
-                </a:solidFill>
-              </a:defRPr>
-            </a:pPr>
-            <a:r>
-              <a:t>→ Immune to interference &amp; jamming</a:t>
-            </a:r>
-          </a:p>
-          <a:p>
-            <a:pPr>
-              <a:spcAft>
-                <a:spcPts val="600"/>
-              </a:spcAft>
-              <a:defRPr sz="1200">
-                <a:solidFill>
-                  <a:srgbClr val="1E293B"/>
-                </a:solidFill>
-              </a:defRPr>
-            </a:pPr>
-            <a:r>
-              <a:t>→ Used in 3G mobile networks &amp; GPS</a:t>
-            </a:r>
-          </a:p>
-        </p:txBody>
-      </p:sp>
-      <p:sp>
-        <p:nvSpPr>
-          <p:cNvPr id="9" name="TextBox 8"/>
+                  <a:srgbClr val="0F172A"/>
+                </a:solidFill>
+              </a:defRPr>
+            </a:pPr>
+            <a:r>
+              <a:t>✔ CDMA allows simultaneous transmission over the same frequency band using orthogonal chip codes.</a:t>
+            </a:r>
+          </a:p>
+        </p:txBody>
+      </p:sp>
+      <p:sp>
+        <p:nvSpPr>
+          <p:cNvPr id="10" name="TextBox 9"/>
           <p:cNvSpPr txBox="1"/>
           <p:nvPr/>
         </p:nvSpPr>
         <p:spPr>
           <a:xfrm>
-            <a:off x="731520" y="6309360"/>
-            <a:ext cx="10789920" cy="365760"/>
+            <a:off x="731520" y="6327648"/>
+            <a:ext cx="10789920" cy="320040"/>
           </a:xfrm>
           <a:prstGeom prst="rect">
             <a:avLst/>
@@ -4795,6 +5606,41 @@
             </a:pPr>
             <a:r>
               <a:t>PCCST501 Computer Networks | KTU 2024 Scheme | Prof. Anju Markose | Assistant Professor, Dept. of CSE | VJCET</a:t>
+            </a:r>
+          </a:p>
+        </p:txBody>
+      </p:sp>
+      <p:sp>
+        <p:nvSpPr>
+          <p:cNvPr id="11" name="TextBox 10"/>
+          <p:cNvSpPr txBox="1"/>
+          <p:nvPr/>
+        </p:nvSpPr>
+        <p:spPr>
+          <a:xfrm>
+            <a:off x="6858000" y="6327648"/>
+            <a:ext cx="4572000" cy="320040"/>
+          </a:xfrm>
+          <a:prstGeom prst="rect">
+            <a:avLst/>
+          </a:prstGeom>
+          <a:noFill/>
+        </p:spPr>
+        <p:txBody>
+          <a:bodyPr wrap="none">
+            <a:spAutoFit/>
+          </a:bodyPr>
+          <a:lstStyle/>
+          <a:p>
+            <a:pPr algn="r">
+              <a:defRPr sz="950">
+                <a:solidFill>
+                  <a:srgbClr val="64748B"/>
+                </a:solidFill>
+              </a:defRPr>
+            </a:pPr>
+            <a:r>
+              <a:t>Dept. of CSE, VJCET</a:t>
             </a:r>
           </a:p>
         </p:txBody>
